--- a/examples/ppt/transitions/transitions-shapes.pptx
+++ b/examples/ppt/transitions/transitions-shapes.pptx
@@ -5,18 +5,20 @@
     <p:sldMasterId xmlns:r="http://schemas.openxmlformats.org/officeDocument/2006/relationships" id="2147483648" r:id="rId1"/>
   </p:sldMasterIdLst>
   <p:sldIdLst>
-    <p:sldId id="256" r:id="R0c0f90a5f24b4184"/>
-    <p:sldId id="257" r:id="Re6d465b9297c41de"/>
-    <p:sldId id="258" r:id="Rd637e5f0a6014f75"/>
-    <p:sldId id="259" r:id="Rcd5d43eec5a44b88"/>
-    <p:sldId id="260" r:id="R7d367927be734e36"/>
-    <p:sldId id="261" r:id="Ra6a112e2e86c4cb5"/>
-    <p:sldId id="262" r:id="R92e3f45ef78644a3"/>
-    <p:sldId id="263" r:id="R5fe9fc3adf2f47b7"/>
-    <p:sldId id="264" r:id="R56d241c8562e4dec"/>
-    <p:sldId id="265" r:id="R21fdc357f3a840ae"/>
-    <p:sldId id="266" r:id="R961a3cb25cad4d60"/>
-    <p:sldId id="267" r:id="Ra509018e469141af"/>
+    <p:sldId id="256" r:id="R0a91c9de69574769"/>
+    <p:sldId id="257" r:id="Re183aea8970f4425"/>
+    <p:sldId id="258" r:id="R24d231c83a2c4bd5"/>
+    <p:sldId id="259" r:id="R91fb0e565aa147f4"/>
+    <p:sldId id="260" r:id="R9f3dab2c2bc64956"/>
+    <p:sldId id="261" r:id="Rd94812d213af431b"/>
+    <p:sldId id="262" r:id="Ra0c9759b9be04a25"/>
+    <p:sldId id="263" r:id="R369a898063194e37"/>
+    <p:sldId id="264" r:id="Re0043eea1bec4569"/>
+    <p:sldId id="265" r:id="R50c8abed69ff4b11"/>
+    <p:sldId id="266" r:id="R5e23108b82d64237"/>
+    <p:sldId id="267" r:id="R78b2763a471147c2"/>
+    <p:sldId id="268" r:id="Rebcbc9510c7a44d6"/>
+    <p:sldId id="269" r:id="Rd1e0ae86e7cb4b3c"/>
   </p:sldIdLst>
   <p:sldSz cx="12192000" cy="6858000"/>
   <p:notesSz cx="6858000" cy="9144000"/>
@@ -453,6 +455,162 @@
                   <a:srgbClr val="FFFFFF"/>
                 </a:solidFill>
               </a:rPr>
+              <a:t>wheel-1 (1 spokes)</a:t>
+            </a:r>
+          </a:p>
+        </p:txBody>
+      </p:sp>
+    </p:spTree>
+  </p:cSld>
+  <p:transition>
+    <p:wheel spokes="1"/>
+  </p:transition>
+</p:sld>
+</file>
+
+<file path=ppt/slides/slide11.xml><?xml version="1.0" encoding="utf-8"?>
+<p:sld xmlns:p="http://schemas.openxmlformats.org/presentationml/2006/main">
+  <p:cSld>
+    <p:spTree>
+      <p:nvGrpSpPr>
+        <p:cNvPr id="1" name=""/>
+        <p:cNvGrpSpPr/>
+        <p:nvPr/>
+      </p:nvGrpSpPr>
+      <p:grpSpPr/>
+      <p:sp>
+        <p:nvSpPr>
+          <p:cNvPr id="10020" name="TextBox 1"/>
+          <p:cNvSpPr/>
+          <p:nvPr/>
+        </p:nvSpPr>
+        <p:spPr>
+          <a:xfrm xmlns:a="http://schemas.openxmlformats.org/drawingml/2006/main">
+            <a:off x="0" y="0"/>
+            <a:ext cx="12193200" cy="6858000"/>
+          </a:xfrm>
+          <a:prstGeom xmlns:a="http://schemas.openxmlformats.org/drawingml/2006/main" prst="rect">
+            <a:avLst/>
+          </a:prstGeom>
+          <a:solidFill xmlns:a="http://schemas.openxmlformats.org/drawingml/2006/main">
+            <a:srgbClr val="7030A0"/>
+          </a:solidFill>
+        </p:spPr>
+        <p:txBody>
+          <a:bodyPr xmlns:a="http://schemas.openxmlformats.org/drawingml/2006/main"/>
+          <a:lstStyle xmlns:a="http://schemas.openxmlformats.org/drawingml/2006/main"/>
+          <a:p xmlns:a="http://schemas.openxmlformats.org/drawingml/2006/main">
+            <a:r>
+              <a:rPr lang="en-US"/>
+              <a:t/>
+            </a:r>
+          </a:p>
+        </p:txBody>
+      </p:sp>
+      <p:sp>
+        <p:nvSpPr>
+          <p:cNvPr id="10021" name="TextBox 2"/>
+          <p:cNvSpPr txBox="1"/>
+          <p:nvPr/>
+        </p:nvSpPr>
+        <p:spPr>
+          <a:xfrm xmlns:a="http://schemas.openxmlformats.org/drawingml/2006/main">
+            <a:off x="720000" y="2520000"/>
+            <a:ext cx="10753200" cy="1440000"/>
+          </a:xfrm>
+          <a:prstGeom xmlns:a="http://schemas.openxmlformats.org/drawingml/2006/main" prst="rect">
+            <a:avLst/>
+          </a:prstGeom>
+        </p:spPr>
+        <p:txBody>
+          <a:bodyPr xmlns:a="http://schemas.openxmlformats.org/drawingml/2006/main"/>
+          <a:lstStyle xmlns:a="http://schemas.openxmlformats.org/drawingml/2006/main"/>
+          <a:p xmlns:a="http://schemas.openxmlformats.org/drawingml/2006/main">
+            <a:pPr algn="ctr"/>
+            <a:r>
+              <a:rPr lang="en-US" sz="4400" b="1">
+                <a:solidFill>
+                  <a:srgbClr val="FFFFFF"/>
+                </a:solidFill>
+              </a:rPr>
+              <a:t>wheel-2 (2 spokes)</a:t>
+            </a:r>
+          </a:p>
+        </p:txBody>
+      </p:sp>
+    </p:spTree>
+  </p:cSld>
+  <p:transition>
+    <p:wheel spokes="2"/>
+  </p:transition>
+</p:sld>
+</file>
+
+<file path=ppt/slides/slide12.xml><?xml version="1.0" encoding="utf-8"?>
+<p:sld xmlns:p="http://schemas.openxmlformats.org/presentationml/2006/main">
+  <p:cSld>
+    <p:spTree>
+      <p:nvGrpSpPr>
+        <p:cNvPr id="1" name=""/>
+        <p:cNvGrpSpPr/>
+        <p:nvPr/>
+      </p:nvGrpSpPr>
+      <p:grpSpPr/>
+      <p:sp>
+        <p:nvSpPr>
+          <p:cNvPr id="10022" name="TextBox 1"/>
+          <p:cNvSpPr/>
+          <p:nvPr/>
+        </p:nvSpPr>
+        <p:spPr>
+          <a:xfrm xmlns:a="http://schemas.openxmlformats.org/drawingml/2006/main">
+            <a:off x="0" y="0"/>
+            <a:ext cx="12193200" cy="6858000"/>
+          </a:xfrm>
+          <a:prstGeom xmlns:a="http://schemas.openxmlformats.org/drawingml/2006/main" prst="rect">
+            <a:avLst/>
+          </a:prstGeom>
+          <a:solidFill xmlns:a="http://schemas.openxmlformats.org/drawingml/2006/main">
+            <a:srgbClr val="7030A0"/>
+          </a:solidFill>
+        </p:spPr>
+        <p:txBody>
+          <a:bodyPr xmlns:a="http://schemas.openxmlformats.org/drawingml/2006/main"/>
+          <a:lstStyle xmlns:a="http://schemas.openxmlformats.org/drawingml/2006/main"/>
+          <a:p xmlns:a="http://schemas.openxmlformats.org/drawingml/2006/main">
+            <a:r>
+              <a:rPr lang="en-US"/>
+              <a:t/>
+            </a:r>
+          </a:p>
+        </p:txBody>
+      </p:sp>
+      <p:sp>
+        <p:nvSpPr>
+          <p:cNvPr id="10023" name="TextBox 2"/>
+          <p:cNvSpPr txBox="1"/>
+          <p:nvPr/>
+        </p:nvSpPr>
+        <p:spPr>
+          <a:xfrm xmlns:a="http://schemas.openxmlformats.org/drawingml/2006/main">
+            <a:off x="720000" y="2520000"/>
+            <a:ext cx="10753200" cy="1440000"/>
+          </a:xfrm>
+          <a:prstGeom xmlns:a="http://schemas.openxmlformats.org/drawingml/2006/main" prst="rect">
+            <a:avLst/>
+          </a:prstGeom>
+        </p:spPr>
+        <p:txBody>
+          <a:bodyPr xmlns:a="http://schemas.openxmlformats.org/drawingml/2006/main"/>
+          <a:lstStyle xmlns:a="http://schemas.openxmlformats.org/drawingml/2006/main"/>
+          <a:p xmlns:a="http://schemas.openxmlformats.org/drawingml/2006/main">
+            <a:pPr algn="ctr"/>
+            <a:r>
+              <a:rPr lang="en-US" sz="4400" b="1">
+                <a:solidFill>
+                  <a:srgbClr val="FFFFFF"/>
+                </a:solidFill>
+              </a:rPr>
               <a:t>wheel-3 (3 spokes)</a:t>
             </a:r>
           </a:p>
@@ -466,7 +624,7 @@
 </p:sld>
 </file>
 
-<file path=ppt/slides/slide11.xml><?xml version="1.0" encoding="utf-8"?>
+<file path=ppt/slides/slide13.xml><?xml version="1.0" encoding="utf-8"?>
 <p:sld xmlns:p="http://schemas.openxmlformats.org/presentationml/2006/main">
   <p:cSld>
     <p:spTree>
@@ -478,7 +636,7 @@
       <p:grpSpPr/>
       <p:sp>
         <p:nvSpPr>
-          <p:cNvPr id="10020" name="TextBox 1"/>
+          <p:cNvPr id="10024" name="TextBox 1"/>
           <p:cNvSpPr/>
           <p:nvPr/>
         </p:nvSpPr>
@@ -507,7 +665,7 @@
       </p:sp>
       <p:sp>
         <p:nvSpPr>
-          <p:cNvPr id="10021" name="TextBox 2"/>
+          <p:cNvPr id="10025" name="TextBox 2"/>
           <p:cNvSpPr txBox="1"/>
           <p:nvPr/>
         </p:nvSpPr>
@@ -544,7 +702,7 @@
 </p:sld>
 </file>
 
-<file path=ppt/slides/slide12.xml><?xml version="1.0" encoding="utf-8"?>
+<file path=ppt/slides/slide14.xml><?xml version="1.0" encoding="utf-8"?>
 <p:sld xmlns:p="http://schemas.openxmlformats.org/presentationml/2006/main">
   <p:cSld>
     <p:spTree>
@@ -556,7 +714,7 @@
       <p:grpSpPr/>
       <p:sp>
         <p:nvSpPr>
-          <p:cNvPr id="10022" name="TextBox 1"/>
+          <p:cNvPr id="10026" name="TextBox 1"/>
           <p:cNvSpPr/>
           <p:nvPr/>
         </p:nvSpPr>
@@ -585,7 +743,7 @@
       </p:sp>
       <p:sp>
         <p:nvSpPr>
-          <p:cNvPr id="10023" name="TextBox 2"/>
+          <p:cNvPr id="10027" name="TextBox 2"/>
           <p:cNvSpPr txBox="1"/>
           <p:nvPr/>
         </p:nvSpPr>
@@ -1091,7 +1249,7 @@
 </file>
 
 <file path=ppt/slides/slide8.xml><?xml version="1.0" encoding="utf-8"?>
-<p:sld xmlns:p="http://schemas.openxmlformats.org/presentationml/2006/main">
+<p:sld xmlns:p15="http://schemas.microsoft.com/office/powerpoint/2012/main" xmlns:mc="http://schemas.openxmlformats.org/markup-compatibility/2006" xmlns:p14="http://schemas.microsoft.com/office/powerpoint/2010/main" xmlns:p="http://schemas.openxmlformats.org/presentationml/2006/main" mc:Ignorable="p15">
   <p:cSld>
     <p:spTree>
       <p:nvGrpSpPr>
@@ -1115,7 +1273,7 @@
             <a:avLst/>
           </a:prstGeom>
           <a:solidFill xmlns:a="http://schemas.openxmlformats.org/drawingml/2006/main">
-            <a:srgbClr val="7030A0"/>
+            <a:srgbClr val="2E75B6"/>
           </a:solidFill>
         </p:spPr>
         <p:txBody>
@@ -1155,21 +1313,30 @@
                   <a:srgbClr val="FFFFFF"/>
                 </a:solidFill>
               </a:rPr>
-              <a:t>wheel-1 (1 spokes)</a:t>
-            </a:r>
-          </a:p>
-        </p:txBody>
-      </p:sp>
-    </p:spTree>
-  </p:cSld>
-  <p:transition>
-    <p:wheel spokes="1"/>
-  </p:transition>
+              <a:t>box-in</a:t>
+            </a:r>
+          </a:p>
+        </p:txBody>
+      </p:sp>
+    </p:spTree>
+  </p:cSld>
+  <mc:AlternateContent>
+    <mc:Choice Requires="p15">
+      <p:transition xmlns:p15="http://schemas.microsoft.com/office/powerpoint/2012/main">
+        <p15:prstTrans prst="box"/>
+      </p:transition>
+    </mc:Choice>
+    <mc:Fallback>
+      <p:transition>
+        <p:fade/>
+      </p:transition>
+    </mc:Fallback>
+  </mc:AlternateContent>
 </p:sld>
 </file>
 
 <file path=ppt/slides/slide9.xml><?xml version="1.0" encoding="utf-8"?>
-<p:sld xmlns:p="http://schemas.openxmlformats.org/presentationml/2006/main">
+<p:sld xmlns:p15="http://schemas.microsoft.com/office/powerpoint/2012/main" xmlns:mc="http://schemas.openxmlformats.org/markup-compatibility/2006" xmlns:p14="http://schemas.microsoft.com/office/powerpoint/2010/main" xmlns:p="http://schemas.openxmlformats.org/presentationml/2006/main" mc:Ignorable="p15">
   <p:cSld>
     <p:spTree>
       <p:nvGrpSpPr>
@@ -1193,7 +1360,7 @@
             <a:avLst/>
           </a:prstGeom>
           <a:solidFill xmlns:a="http://schemas.openxmlformats.org/drawingml/2006/main">
-            <a:srgbClr val="7030A0"/>
+            <a:srgbClr val="2E75B6"/>
           </a:solidFill>
         </p:spPr>
         <p:txBody>
@@ -1233,16 +1400,25 @@
                   <a:srgbClr val="FFFFFF"/>
                 </a:solidFill>
               </a:rPr>
-              <a:t>wheel-2 (2 spokes)</a:t>
-            </a:r>
-          </a:p>
-        </p:txBody>
-      </p:sp>
-    </p:spTree>
-  </p:cSld>
-  <p:transition>
-    <p:wheel spokes="2"/>
-  </p:transition>
+              <a:t>box-out</a:t>
+            </a:r>
+          </a:p>
+        </p:txBody>
+      </p:sp>
+    </p:spTree>
+  </p:cSld>
+  <mc:AlternateContent>
+    <mc:Choice Requires="p15">
+      <p:transition xmlns:p15="http://schemas.microsoft.com/office/powerpoint/2012/main">
+        <p15:prstTrans prst="box" invX="1" invY="1"/>
+      </p:transition>
+    </mc:Choice>
+    <mc:Fallback>
+      <p:transition>
+        <p:fade/>
+      </p:transition>
+    </mc:Fallback>
+  </mc:AlternateContent>
 </p:sld>
 </file>
 
